--- a/docs/verity-prototype.pptx
+++ b/docs/verity-prototype.pptx
@@ -3299,7 +3299,7 @@
                 </a:solidFill>
                 <a:latin typeface="Arial"/>
               </a:rPr>
-              <a:t>[TEAM NAME]</a:t>
+              <a:t>Coyot</a:t>
             </a:r>
           </a:p>
         </p:txBody>
@@ -3467,7 +3467,7 @@
                 </a:solidFill>
                 <a:latin typeface="Arial"/>
               </a:rPr>
-              <a:t>[TEAM LEADER NAME]</a:t>
+              <a:t>Priyanka Karmakar</a:t>
             </a:r>
           </a:p>
         </p:txBody>
@@ -3551,7 +3551,7 @@
                 </a:solidFill>
                 <a:latin typeface="Arial"/>
               </a:rPr>
-              <a:t>[TEAM SIZE]</a:t>
+              <a:t>2 — Priyanka Karmakar (lead), Mohammed Favas</a:t>
             </a:r>
           </a:p>
         </p:txBody>
@@ -4064,7 +4064,7 @@
                 </a:solidFill>
                 <a:latin typeface="Arial"/>
               </a:rPr>
-              <a:t>CMS-0057-F requires payers to return prior-authorization decisions within fixed windows and to state a specific reason for each. "The model decided" is not a reason. Every criterion must be individually defensible and traceable to a source.</a:t>
+              <a:t>Since January 2026, CMS-0057-F requires impacted payers to return prior-authorization decisions within 72 hours (expedited) or 7 calendar days (standard), and to give a specific reason for every denial. "The model decided" is not a reason. Each criterion must be individually defensible and traceable to a source.</a:t>
             </a:r>
           </a:p>
         </p:txBody>
@@ -6691,7 +6691,7 @@
                 </a:solidFill>
                 <a:latin typeface="Arial"/>
               </a:rPr>
-              <a:t> converts parsed policy prose into the criteria tree, and is scored blind against a held-out answer key. CoCo also drove schema iteration and debugged the console in-product.</a:t>
+              <a:t> converts parsed policy prose into the criteria tree, scored blind against a held-out answer key. It recovered every node independently and added two the hand-authored key was missing.</a:t>
             </a:r>
           </a:p>
         </p:txBody>

--- a/docs/verity-prototype.pptx
+++ b/docs/verity-prototype.pptx
@@ -3299,7 +3299,7 @@
                 </a:solidFill>
                 <a:latin typeface="Arial"/>
               </a:rPr>
-              <a:t>Coyot</a:t>
+              <a:t>Team Alpha</a:t>
             </a:r>
           </a:p>
         </p:txBody>

--- a/docs/verity-prototype.pptx
+++ b/docs/verity-prototype.pptx
@@ -6873,7 +6873,7 @@
         <p:spPr>
           <a:xfrm>
             <a:off x="420624" y="1682495"/>
-            <a:ext cx="4050791" cy="1188720"/>
+            <a:ext cx="4050791" cy="1060704"/>
           </a:xfrm>
           <a:prstGeom prst="roundRect">
             <a:avLst>
@@ -6994,7 +6994,7 @@
         <p:spPr>
           <a:xfrm>
             <a:off x="4672583" y="1682495"/>
-            <a:ext cx="4050791" cy="1188720"/>
+            <a:ext cx="4050791" cy="1060704"/>
           </a:xfrm>
           <a:prstGeom prst="roundRect">
             <a:avLst>
@@ -7114,8 +7114,8 @@
         </p:nvSpPr>
         <p:spPr>
           <a:xfrm>
-            <a:off x="420624" y="2999232"/>
-            <a:ext cx="8302751" cy="512064"/>
+            <a:off x="420624" y="2852928"/>
+            <a:ext cx="8302751" cy="475488"/>
           </a:xfrm>
           <a:prstGeom prst="roundRect">
             <a:avLst>
@@ -7185,7 +7185,7 @@
         </p:nvSpPr>
         <p:spPr>
           <a:xfrm>
-            <a:off x="420624" y="3639311"/>
+            <a:off x="420624" y="3419856"/>
             <a:ext cx="8302751" cy="201168"/>
           </a:xfrm>
           <a:prstGeom prst="rect">
@@ -7214,7 +7214,7 @@
                 </a:solidFill>
                 <a:latin typeface="Arial"/>
               </a:rPr>
-              <a:t>THE SAME REVIEW, THREE MEMBERS</a:t>
+              <a:t>THREE CASES, THREE DIFFERENT PATHS</a:t>
             </a:r>
           </a:p>
         </p:txBody>
@@ -7227,7 +7227,7 @@
         </p:nvSpPr>
         <p:spPr>
           <a:xfrm>
-            <a:off x="420624" y="3895343"/>
+            <a:off x="420624" y="3648456"/>
             <a:ext cx="1170432" cy="182880"/>
           </a:xfrm>
           <a:prstGeom prst="rect">
@@ -7269,7 +7269,7 @@
         </p:nvSpPr>
         <p:spPr>
           <a:xfrm>
-            <a:off x="1627632" y="3877055"/>
+            <a:off x="1627632" y="3630168"/>
             <a:ext cx="676656" cy="173736"/>
           </a:xfrm>
           <a:prstGeom prst="roundRect">
@@ -7331,7 +7331,7 @@
         </p:nvSpPr>
         <p:spPr>
           <a:xfrm>
-            <a:off x="2395728" y="3886199"/>
+            <a:off x="2395728" y="3639312"/>
             <a:ext cx="6327647" cy="310896"/>
           </a:xfrm>
           <a:prstGeom prst="rect">
@@ -7373,7 +7373,7 @@
         </p:nvSpPr>
         <p:spPr>
           <a:xfrm>
-            <a:off x="420624" y="4279391"/>
+            <a:off x="420624" y="3968496"/>
             <a:ext cx="1170432" cy="182880"/>
           </a:xfrm>
           <a:prstGeom prst="rect">
@@ -7415,7 +7415,7 @@
         </p:nvSpPr>
         <p:spPr>
           <a:xfrm>
-            <a:off x="1627632" y="4261103"/>
+            <a:off x="1627632" y="3950208"/>
             <a:ext cx="676656" cy="173736"/>
           </a:xfrm>
           <a:prstGeom prst="roundRect">
@@ -7477,7 +7477,7 @@
         </p:nvSpPr>
         <p:spPr>
           <a:xfrm>
-            <a:off x="2395728" y="4270247"/>
+            <a:off x="2395728" y="3959352"/>
             <a:ext cx="6327647" cy="310896"/>
           </a:xfrm>
           <a:prstGeom prst="rect">
@@ -7519,7 +7519,7 @@
         </p:nvSpPr>
         <p:spPr>
           <a:xfrm>
-            <a:off x="420624" y="4663439"/>
+            <a:off x="420624" y="4288536"/>
             <a:ext cx="1170432" cy="182880"/>
           </a:xfrm>
           <a:prstGeom prst="rect">
@@ -7561,7 +7561,7 @@
         </p:nvSpPr>
         <p:spPr>
           <a:xfrm>
-            <a:off x="1627632" y="4645151"/>
+            <a:off x="1627632" y="4270248"/>
             <a:ext cx="676656" cy="173736"/>
           </a:xfrm>
           <a:prstGeom prst="roundRect">
@@ -7623,7 +7623,7 @@
         </p:nvSpPr>
         <p:spPr>
           <a:xfrm>
-            <a:off x="2395728" y="4654295"/>
+            <a:off x="2395728" y="4279392"/>
             <a:ext cx="6327647" cy="310896"/>
           </a:xfrm>
           <a:prstGeom prst="rect">
@@ -7653,6 +7653,79 @@
                 <a:latin typeface="Arial"/>
               </a:rPr>
               <a:t>Every criterion passes, but a family history of medullary thyroid carcinoma is buried in a consult note. §5.1 fires.</a:t>
+            </a:r>
+          </a:p>
+        </p:txBody>
+      </p:sp>
+      <p:sp>
+        <p:nvSpPr>
+          <p:cNvPr id="19" name="Rounded Rectangle 18"/>
+          <p:cNvSpPr/>
+          <p:nvPr/>
+        </p:nvSpPr>
+        <p:spPr>
+          <a:xfrm>
+            <a:off x="420624" y="4626864"/>
+            <a:ext cx="8302751" cy="274320"/>
+          </a:xfrm>
+          <a:prstGeom prst="roundRect">
+            <a:avLst>
+              <a:gd name="adj" fmla="val 10000"/>
+            </a:avLst>
+          </a:prstGeom>
+          <a:solidFill>
+            <a:srgbClr val="FFFFFF"/>
+          </a:solidFill>
+          <a:ln w="9525">
+            <a:solidFill>
+              <a:srgbClr val="1BA0F2"/>
+            </a:solidFill>
+          </a:ln>
+          <a:effectLst/>
+        </p:spPr>
+        <p:style>
+          <a:lnRef idx="1">
+            <a:schemeClr val="accent1"/>
+          </a:lnRef>
+          <a:fillRef idx="3">
+            <a:schemeClr val="accent1"/>
+          </a:fillRef>
+          <a:effectRef idx="2">
+            <a:schemeClr val="accent1"/>
+          </a:effectRef>
+          <a:fontRef idx="minor">
+            <a:schemeClr val="lt1"/>
+          </a:fontRef>
+        </p:style>
+        <p:txBody>
+          <a:bodyPr rtlCol="0" anchor="ctr" wrap="square" lIns="73152" rIns="73152"/>
+          <a:lstStyle/>
+          <a:p>
+            <a:pPr algn="l">
+              <a:spcBef>
+                <a:spcPts val="0"/>
+              </a:spcBef>
+              <a:spcAft>
+                <a:spcPts val="0"/>
+              </a:spcAft>
+            </a:pPr>
+            <a:r>
+              <a:rPr sz="850" b="1" i="0">
+                <a:solidFill>
+                  <a:srgbClr val="1BA0F2"/>
+                </a:solidFill>
+                <a:latin typeface="Arial"/>
+              </a:rPr>
+              <a:t>Not just these three.  </a:t>
+            </a:r>
+            <a:r>
+              <a:rPr sz="850" b="0" i="0">
+                <a:solidFill>
+                  <a:srgbClr val="334045"/>
+                </a:solidFill>
+                <a:latin typeface="Arial"/>
+              </a:rPr>
+              <a:t>Any of the 5,003 members can be reviewed on demand — the same 21 criteria, adjudicated live in about 40 seconds.</a:t>
             </a:r>
           </a:p>
         </p:txBody>
@@ -9806,7 +9879,7 @@
                 </a:solidFill>
                 <a:latin typeface="Arial"/>
               </a:rPr>
-              <a:t>Scales by policy</a:t>
+              <a:t>Already population-scale</a:t>
             </a:r>
           </a:p>
           <a:p>
@@ -9825,7 +9898,7 @@
                 </a:solidFill>
                 <a:latin typeface="Arial"/>
               </a:rPr>
-              <a:t>Adding a policy is adding a PDF. Parsing, extraction and scoring already run unattended.</a:t>
+              <a:t>Any of the 5,003 members is reviewable on demand today. Adding a policy is adding a PDF — parsing, extraction and scoring already run unattended.</a:t>
             </a:r>
           </a:p>
         </p:txBody>
